--- a/TAZA/_документы/Структура ЦАКФ и проектного офиса ТК — без окладов.pptx
+++ b/TAZA/_документы/Структура ЦАКФ и проектного офиса ТК — без окладов.pptx
@@ -5,7 +5,7 @@
     <p:sldMasterId id="2147483648" r:id="rId1"/>
   </p:sldMasterIdLst>
   <p:sldIdLst>
-    <p:sldId id="256" r:id="rId3"/>
+    <p:sldId id="256" r:id="rId2"/>
   </p:sldIdLst>
   <p:sldSz cx="12192000" cy="6858000"/>
   <p:notesSz cx="6858000" cy="9144000"/>
@@ -238,6 +238,7 @@
           <a:p>
             <a:fld id="{C2BA13B7-D241-4424-B4BE-2E78B20DBCAC}" type="datetimeFigureOut">
               <a:rPr lang="ru-RU" smtClean="0"/>
+              <a:t>14.10.2026</a:t>
             </a:fld>
             <a:endParaRPr lang="ru-RU"/>
           </a:p>
@@ -279,6 +280,7 @@
           <a:p>
             <a:fld id="{C429094C-EE5E-46D5-9F99-8551D18087AF}" type="slidenum">
               <a:rPr lang="ru-RU" smtClean="0"/>
+              <a:t>‹#›</a:t>
             </a:fld>
             <a:endParaRPr lang="ru-RU"/>
           </a:p>
@@ -352,7 +354,6 @@
               <a:rPr lang="ru-RU" smtClean="0"/>
               <a:t>Образец текста</a:t>
             </a:r>
-            <a:endParaRPr lang="ru-RU" smtClean="0"/>
           </a:p>
           <a:p>
             <a:pPr lvl="1"/>
@@ -360,7 +361,6 @@
               <a:rPr lang="ru-RU" smtClean="0"/>
               <a:t>Второй уровень</a:t>
             </a:r>
-            <a:endParaRPr lang="ru-RU" smtClean="0"/>
           </a:p>
           <a:p>
             <a:pPr lvl="2"/>
@@ -368,7 +368,6 @@
               <a:rPr lang="ru-RU" smtClean="0"/>
               <a:t>Третий уровень</a:t>
             </a:r>
-            <a:endParaRPr lang="ru-RU" smtClean="0"/>
           </a:p>
           <a:p>
             <a:pPr lvl="3"/>
@@ -376,7 +375,6 @@
               <a:rPr lang="ru-RU" smtClean="0"/>
               <a:t>Четвертый уровень</a:t>
             </a:r>
-            <a:endParaRPr lang="ru-RU" smtClean="0"/>
           </a:p>
           <a:p>
             <a:pPr lvl="4"/>
@@ -405,6 +403,7 @@
           <a:p>
             <a:fld id="{C2BA13B7-D241-4424-B4BE-2E78B20DBCAC}" type="datetimeFigureOut">
               <a:rPr lang="ru-RU" smtClean="0"/>
+              <a:t>14.10.2026</a:t>
             </a:fld>
             <a:endParaRPr lang="ru-RU"/>
           </a:p>
@@ -446,6 +445,7 @@
           <a:p>
             <a:fld id="{C429094C-EE5E-46D5-9F99-8551D18087AF}" type="slidenum">
               <a:rPr lang="ru-RU" smtClean="0"/>
+              <a:t>‹#›</a:t>
             </a:fld>
             <a:endParaRPr lang="ru-RU"/>
           </a:p>
@@ -529,7 +529,6 @@
               <a:rPr lang="ru-RU" smtClean="0"/>
               <a:t>Образец текста</a:t>
             </a:r>
-            <a:endParaRPr lang="ru-RU" smtClean="0"/>
           </a:p>
           <a:p>
             <a:pPr lvl="1"/>
@@ -537,7 +536,6 @@
               <a:rPr lang="ru-RU" smtClean="0"/>
               <a:t>Второй уровень</a:t>
             </a:r>
-            <a:endParaRPr lang="ru-RU" smtClean="0"/>
           </a:p>
           <a:p>
             <a:pPr lvl="2"/>
@@ -545,7 +543,6 @@
               <a:rPr lang="ru-RU" smtClean="0"/>
               <a:t>Третий уровень</a:t>
             </a:r>
-            <a:endParaRPr lang="ru-RU" smtClean="0"/>
           </a:p>
           <a:p>
             <a:pPr lvl="3"/>
@@ -553,7 +550,6 @@
               <a:rPr lang="ru-RU" smtClean="0"/>
               <a:t>Четвертый уровень</a:t>
             </a:r>
-            <a:endParaRPr lang="ru-RU" smtClean="0"/>
           </a:p>
           <a:p>
             <a:pPr lvl="4"/>
@@ -582,6 +578,7 @@
           <a:p>
             <a:fld id="{C2BA13B7-D241-4424-B4BE-2E78B20DBCAC}" type="datetimeFigureOut">
               <a:rPr lang="ru-RU" smtClean="0"/>
+              <a:t>14.10.2026</a:t>
             </a:fld>
             <a:endParaRPr lang="ru-RU"/>
           </a:p>
@@ -623,6 +620,7 @@
           <a:p>
             <a:fld id="{C429094C-EE5E-46D5-9F99-8551D18087AF}" type="slidenum">
               <a:rPr lang="ru-RU" smtClean="0"/>
+              <a:t>‹#›</a:t>
             </a:fld>
             <a:endParaRPr lang="ru-RU"/>
           </a:p>
@@ -696,7 +694,6 @@
               <a:rPr lang="ru-RU" smtClean="0"/>
               <a:t>Образец текста</a:t>
             </a:r>
-            <a:endParaRPr lang="ru-RU" smtClean="0"/>
           </a:p>
           <a:p>
             <a:pPr lvl="1"/>
@@ -704,7 +701,6 @@
               <a:rPr lang="ru-RU" smtClean="0"/>
               <a:t>Второй уровень</a:t>
             </a:r>
-            <a:endParaRPr lang="ru-RU" smtClean="0"/>
           </a:p>
           <a:p>
             <a:pPr lvl="2"/>
@@ -712,7 +708,6 @@
               <a:rPr lang="ru-RU" smtClean="0"/>
               <a:t>Третий уровень</a:t>
             </a:r>
-            <a:endParaRPr lang="ru-RU" smtClean="0"/>
           </a:p>
           <a:p>
             <a:pPr lvl="3"/>
@@ -720,7 +715,6 @@
               <a:rPr lang="ru-RU" smtClean="0"/>
               <a:t>Четвертый уровень</a:t>
             </a:r>
-            <a:endParaRPr lang="ru-RU" smtClean="0"/>
           </a:p>
           <a:p>
             <a:pPr lvl="4"/>
@@ -749,6 +743,7 @@
           <a:p>
             <a:fld id="{C2BA13B7-D241-4424-B4BE-2E78B20DBCAC}" type="datetimeFigureOut">
               <a:rPr lang="ru-RU" smtClean="0"/>
+              <a:t>14.10.2026</a:t>
             </a:fld>
             <a:endParaRPr lang="ru-RU"/>
           </a:p>
@@ -790,6 +785,7 @@
           <a:p>
             <a:fld id="{C429094C-EE5E-46D5-9F99-8551D18087AF}" type="slidenum">
               <a:rPr lang="ru-RU" smtClean="0"/>
+              <a:t>‹#›</a:t>
             </a:fld>
             <a:endParaRPr lang="ru-RU"/>
           </a:p>
@@ -968,7 +964,6 @@
               <a:rPr lang="ru-RU" smtClean="0"/>
               <a:t>Образец текста</a:t>
             </a:r>
-            <a:endParaRPr lang="ru-RU" smtClean="0"/>
           </a:p>
         </p:txBody>
       </p:sp>
@@ -989,6 +984,7 @@
           <a:p>
             <a:fld id="{C2BA13B7-D241-4424-B4BE-2E78B20DBCAC}" type="datetimeFigureOut">
               <a:rPr lang="ru-RU" smtClean="0"/>
+              <a:t>14.10.2026</a:t>
             </a:fld>
             <a:endParaRPr lang="ru-RU"/>
           </a:p>
@@ -1030,6 +1026,7 @@
           <a:p>
             <a:fld id="{C429094C-EE5E-46D5-9F99-8551D18087AF}" type="slidenum">
               <a:rPr lang="ru-RU" smtClean="0"/>
+              <a:t>‹#›</a:t>
             </a:fld>
             <a:endParaRPr lang="ru-RU"/>
           </a:p>
@@ -1108,7 +1105,6 @@
               <a:rPr lang="ru-RU" smtClean="0"/>
               <a:t>Образец текста</a:t>
             </a:r>
-            <a:endParaRPr lang="ru-RU" smtClean="0"/>
           </a:p>
           <a:p>
             <a:pPr lvl="1"/>
@@ -1116,7 +1112,6 @@
               <a:rPr lang="ru-RU" smtClean="0"/>
               <a:t>Второй уровень</a:t>
             </a:r>
-            <a:endParaRPr lang="ru-RU" smtClean="0"/>
           </a:p>
           <a:p>
             <a:pPr lvl="2"/>
@@ -1124,7 +1119,6 @@
               <a:rPr lang="ru-RU" smtClean="0"/>
               <a:t>Третий уровень</a:t>
             </a:r>
-            <a:endParaRPr lang="ru-RU" smtClean="0"/>
           </a:p>
           <a:p>
             <a:pPr lvl="3"/>
@@ -1132,7 +1126,6 @@
               <a:rPr lang="ru-RU" smtClean="0"/>
               <a:t>Четвертый уровень</a:t>
             </a:r>
-            <a:endParaRPr lang="ru-RU" smtClean="0"/>
           </a:p>
           <a:p>
             <a:pPr lvl="4"/>
@@ -1169,7 +1162,6 @@
               <a:rPr lang="ru-RU" smtClean="0"/>
               <a:t>Образец текста</a:t>
             </a:r>
-            <a:endParaRPr lang="ru-RU" smtClean="0"/>
           </a:p>
           <a:p>
             <a:pPr lvl="1"/>
@@ -1177,7 +1169,6 @@
               <a:rPr lang="ru-RU" smtClean="0"/>
               <a:t>Второй уровень</a:t>
             </a:r>
-            <a:endParaRPr lang="ru-RU" smtClean="0"/>
           </a:p>
           <a:p>
             <a:pPr lvl="2"/>
@@ -1185,7 +1176,6 @@
               <a:rPr lang="ru-RU" smtClean="0"/>
               <a:t>Третий уровень</a:t>
             </a:r>
-            <a:endParaRPr lang="ru-RU" smtClean="0"/>
           </a:p>
           <a:p>
             <a:pPr lvl="3"/>
@@ -1193,7 +1183,6 @@
               <a:rPr lang="ru-RU" smtClean="0"/>
               <a:t>Четвертый уровень</a:t>
             </a:r>
-            <a:endParaRPr lang="ru-RU" smtClean="0"/>
           </a:p>
           <a:p>
             <a:pPr lvl="4"/>
@@ -1222,6 +1211,7 @@
           <a:p>
             <a:fld id="{C2BA13B7-D241-4424-B4BE-2E78B20DBCAC}" type="datetimeFigureOut">
               <a:rPr lang="ru-RU" smtClean="0"/>
+              <a:t>14.10.2026</a:t>
             </a:fld>
             <a:endParaRPr lang="ru-RU"/>
           </a:p>
@@ -1263,6 +1253,7 @@
           <a:p>
             <a:fld id="{C429094C-EE5E-46D5-9F99-8551D18087AF}" type="slidenum">
               <a:rPr lang="ru-RU" smtClean="0"/>
+              <a:t>‹#›</a:t>
             </a:fld>
             <a:endParaRPr lang="ru-RU"/>
           </a:p>
@@ -1383,7 +1374,6 @@
               <a:rPr lang="ru-RU" smtClean="0"/>
               <a:t>Образец текста</a:t>
             </a:r>
-            <a:endParaRPr lang="ru-RU" smtClean="0"/>
           </a:p>
         </p:txBody>
       </p:sp>
@@ -1412,7 +1402,6 @@
               <a:rPr lang="ru-RU" smtClean="0"/>
               <a:t>Образец текста</a:t>
             </a:r>
-            <a:endParaRPr lang="ru-RU" smtClean="0"/>
           </a:p>
           <a:p>
             <a:pPr lvl="1"/>
@@ -1420,7 +1409,6 @@
               <a:rPr lang="ru-RU" smtClean="0"/>
               <a:t>Второй уровень</a:t>
             </a:r>
-            <a:endParaRPr lang="ru-RU" smtClean="0"/>
           </a:p>
           <a:p>
             <a:pPr lvl="2"/>
@@ -1428,7 +1416,6 @@
               <a:rPr lang="ru-RU" smtClean="0"/>
               <a:t>Третий уровень</a:t>
             </a:r>
-            <a:endParaRPr lang="ru-RU" smtClean="0"/>
           </a:p>
           <a:p>
             <a:pPr lvl="3"/>
@@ -1436,7 +1423,6 @@
               <a:rPr lang="ru-RU" smtClean="0"/>
               <a:t>Четвертый уровень</a:t>
             </a:r>
-            <a:endParaRPr lang="ru-RU" smtClean="0"/>
           </a:p>
           <a:p>
             <a:pPr lvl="4"/>
@@ -1510,7 +1496,6 @@
               <a:rPr lang="ru-RU" smtClean="0"/>
               <a:t>Образец текста</a:t>
             </a:r>
-            <a:endParaRPr lang="ru-RU" smtClean="0"/>
           </a:p>
         </p:txBody>
       </p:sp>
@@ -1539,7 +1524,6 @@
               <a:rPr lang="ru-RU" smtClean="0"/>
               <a:t>Образец текста</a:t>
             </a:r>
-            <a:endParaRPr lang="ru-RU" smtClean="0"/>
           </a:p>
           <a:p>
             <a:pPr lvl="1"/>
@@ -1547,7 +1531,6 @@
               <a:rPr lang="ru-RU" smtClean="0"/>
               <a:t>Второй уровень</a:t>
             </a:r>
-            <a:endParaRPr lang="ru-RU" smtClean="0"/>
           </a:p>
           <a:p>
             <a:pPr lvl="2"/>
@@ -1555,7 +1538,6 @@
               <a:rPr lang="ru-RU" smtClean="0"/>
               <a:t>Третий уровень</a:t>
             </a:r>
-            <a:endParaRPr lang="ru-RU" smtClean="0"/>
           </a:p>
           <a:p>
             <a:pPr lvl="3"/>
@@ -1563,7 +1545,6 @@
               <a:rPr lang="ru-RU" smtClean="0"/>
               <a:t>Четвертый уровень</a:t>
             </a:r>
-            <a:endParaRPr lang="ru-RU" smtClean="0"/>
           </a:p>
           <a:p>
             <a:pPr lvl="4"/>
@@ -1592,6 +1573,7 @@
           <a:p>
             <a:fld id="{C2BA13B7-D241-4424-B4BE-2E78B20DBCAC}" type="datetimeFigureOut">
               <a:rPr lang="ru-RU" smtClean="0"/>
+              <a:t>14.10.2026</a:t>
             </a:fld>
             <a:endParaRPr lang="ru-RU"/>
           </a:p>
@@ -1633,6 +1615,7 @@
           <a:p>
             <a:fld id="{C429094C-EE5E-46D5-9F99-8551D18087AF}" type="slidenum">
               <a:rPr lang="ru-RU" smtClean="0"/>
+              <a:t>‹#›</a:t>
             </a:fld>
             <a:endParaRPr lang="ru-RU"/>
           </a:p>
@@ -1703,6 +1686,7 @@
           <a:p>
             <a:fld id="{C2BA13B7-D241-4424-B4BE-2E78B20DBCAC}" type="datetimeFigureOut">
               <a:rPr lang="ru-RU" smtClean="0"/>
+              <a:t>14.10.2026</a:t>
             </a:fld>
             <a:endParaRPr lang="ru-RU"/>
           </a:p>
@@ -1744,6 +1728,7 @@
           <a:p>
             <a:fld id="{C429094C-EE5E-46D5-9F99-8551D18087AF}" type="slidenum">
               <a:rPr lang="ru-RU" smtClean="0"/>
+              <a:t>‹#›</a:t>
             </a:fld>
             <a:endParaRPr lang="ru-RU"/>
           </a:p>
@@ -1791,6 +1776,7 @@
           <a:p>
             <a:fld id="{C2BA13B7-D241-4424-B4BE-2E78B20DBCAC}" type="datetimeFigureOut">
               <a:rPr lang="ru-RU" smtClean="0"/>
+              <a:t>14.10.2026</a:t>
             </a:fld>
             <a:endParaRPr lang="ru-RU"/>
           </a:p>
@@ -1832,6 +1818,7 @@
           <a:p>
             <a:fld id="{C429094C-EE5E-46D5-9F99-8551D18087AF}" type="slidenum">
               <a:rPr lang="ru-RU" smtClean="0"/>
+              <a:t>‹#›</a:t>
             </a:fld>
             <a:endParaRPr lang="ru-RU"/>
           </a:p>
@@ -1947,7 +1934,6 @@
               <a:rPr lang="ru-RU" smtClean="0"/>
               <a:t>Образец текста</a:t>
             </a:r>
-            <a:endParaRPr lang="ru-RU" smtClean="0"/>
           </a:p>
           <a:p>
             <a:pPr lvl="1"/>
@@ -1955,7 +1941,6 @@
               <a:rPr lang="ru-RU" smtClean="0"/>
               <a:t>Второй уровень</a:t>
             </a:r>
-            <a:endParaRPr lang="ru-RU" smtClean="0"/>
           </a:p>
           <a:p>
             <a:pPr lvl="2"/>
@@ -1963,7 +1948,6 @@
               <a:rPr lang="ru-RU" smtClean="0"/>
               <a:t>Третий уровень</a:t>
             </a:r>
-            <a:endParaRPr lang="ru-RU" smtClean="0"/>
           </a:p>
           <a:p>
             <a:pPr lvl="3"/>
@@ -1971,7 +1955,6 @@
               <a:rPr lang="ru-RU" smtClean="0"/>
               <a:t>Четвертый уровень</a:t>
             </a:r>
-            <a:endParaRPr lang="ru-RU" smtClean="0"/>
           </a:p>
           <a:p>
             <a:pPr lvl="4"/>
@@ -2045,7 +2028,6 @@
               <a:rPr lang="ru-RU" smtClean="0"/>
               <a:t>Образец текста</a:t>
             </a:r>
-            <a:endParaRPr lang="ru-RU" smtClean="0"/>
           </a:p>
         </p:txBody>
       </p:sp>
@@ -2066,6 +2048,7 @@
           <a:p>
             <a:fld id="{C2BA13B7-D241-4424-B4BE-2E78B20DBCAC}" type="datetimeFigureOut">
               <a:rPr lang="ru-RU" smtClean="0"/>
+              <a:t>14.10.2026</a:t>
             </a:fld>
             <a:endParaRPr lang="ru-RU"/>
           </a:p>
@@ -2107,6 +2090,7 @@
           <a:p>
             <a:fld id="{C429094C-EE5E-46D5-9F99-8551D18087AF}" type="slidenum">
               <a:rPr lang="ru-RU" smtClean="0"/>
+              <a:t>‹#›</a:t>
             </a:fld>
             <a:endParaRPr lang="ru-RU"/>
           </a:p>
@@ -2292,7 +2276,6 @@
               <a:rPr lang="ru-RU" smtClean="0"/>
               <a:t>Образец текста</a:t>
             </a:r>
-            <a:endParaRPr lang="ru-RU" smtClean="0"/>
           </a:p>
         </p:txBody>
       </p:sp>
@@ -2313,6 +2296,7 @@
           <a:p>
             <a:fld id="{C2BA13B7-D241-4424-B4BE-2E78B20DBCAC}" type="datetimeFigureOut">
               <a:rPr lang="ru-RU" smtClean="0"/>
+              <a:t>14.10.2026</a:t>
             </a:fld>
             <a:endParaRPr lang="ru-RU"/>
           </a:p>
@@ -2354,6 +2338,7 @@
           <a:p>
             <a:fld id="{C429094C-EE5E-46D5-9F99-8551D18087AF}" type="slidenum">
               <a:rPr lang="ru-RU" smtClean="0"/>
+              <a:t>‹#›</a:t>
             </a:fld>
             <a:endParaRPr lang="ru-RU"/>
           </a:p>
@@ -2452,7 +2437,6 @@
               <a:rPr lang="ru-RU" smtClean="0"/>
               <a:t>Образец текста</a:t>
             </a:r>
-            <a:endParaRPr lang="ru-RU" smtClean="0"/>
           </a:p>
           <a:p>
             <a:pPr lvl="1"/>
@@ -2460,7 +2444,6 @@
               <a:rPr lang="ru-RU" smtClean="0"/>
               <a:t>Второй уровень</a:t>
             </a:r>
-            <a:endParaRPr lang="ru-RU" smtClean="0"/>
           </a:p>
           <a:p>
             <a:pPr lvl="2"/>
@@ -2468,7 +2451,6 @@
               <a:rPr lang="ru-RU" smtClean="0"/>
               <a:t>Третий уровень</a:t>
             </a:r>
-            <a:endParaRPr lang="ru-RU" smtClean="0"/>
           </a:p>
           <a:p>
             <a:pPr lvl="3"/>
@@ -2476,7 +2458,6 @@
               <a:rPr lang="ru-RU" smtClean="0"/>
               <a:t>Четвертый уровень</a:t>
             </a:r>
-            <a:endParaRPr lang="ru-RU" smtClean="0"/>
           </a:p>
           <a:p>
             <a:pPr lvl="4"/>
@@ -2523,6 +2504,7 @@
           <a:p>
             <a:fld id="{C2BA13B7-D241-4424-B4BE-2E78B20DBCAC}" type="datetimeFigureOut">
               <a:rPr lang="ru-RU" smtClean="0"/>
+              <a:t>14.10.2026</a:t>
             </a:fld>
             <a:endParaRPr lang="ru-RU"/>
           </a:p>
@@ -2600,6 +2582,7 @@
           <a:p>
             <a:fld id="{C429094C-EE5E-46D5-9F99-8551D18087AF}" type="slidenum">
               <a:rPr lang="ru-RU" smtClean="0"/>
+              <a:t>‹#›</a:t>
             </a:fld>
             <a:endParaRPr lang="ru-RU"/>
           </a:p>
@@ -2995,8 +2978,8 @@
         </p:nvCxnSpPr>
         <p:spPr>
           <a:xfrm>
-            <a:off x="8470900" y="3759200"/>
-            <a:ext cx="0" cy="2641600"/>
+            <a:off x="8470900" y="4216400"/>
+            <a:ext cx="0" cy="2184400"/>
           </a:xfrm>
           <a:prstGeom prst="line">
             <a:avLst/>
@@ -3500,7 +3483,7 @@
         </p:nvCxnSpPr>
         <p:spPr>
           <a:xfrm>
-            <a:off x="9321800" y="3505200"/>
+            <a:off x="9321800" y="3378200"/>
             <a:ext cx="76200" cy="0"/>
           </a:xfrm>
           <a:prstGeom prst="line">
@@ -3521,7 +3504,7 @@
         </p:nvCxnSpPr>
         <p:spPr>
           <a:xfrm>
-            <a:off x="9321800" y="2946400"/>
+            <a:off x="9321800" y="2882900"/>
             <a:ext cx="76200" cy="0"/>
           </a:xfrm>
           <a:prstGeom prst="line">
@@ -3543,7 +3526,7 @@
         <p:spPr>
           <a:xfrm>
             <a:off x="9398000" y="2616200"/>
-            <a:ext cx="0" cy="889000"/>
+            <a:ext cx="0" cy="1320800"/>
           </a:xfrm>
           <a:prstGeom prst="line">
             <a:avLst/>
@@ -3649,8 +3632,8 @@
         </p:nvCxnSpPr>
         <p:spPr>
           <a:xfrm>
-            <a:off x="9550400" y="1460500"/>
-            <a:ext cx="0" cy="393700"/>
+            <a:off x="9550400" y="1663700"/>
+            <a:ext cx="0" cy="190500"/>
           </a:xfrm>
           <a:prstGeom prst="line">
             <a:avLst/>
@@ -3670,7 +3653,7 @@
         </p:nvCxnSpPr>
         <p:spPr>
           <a:xfrm>
-            <a:off x="9550400" y="1460500"/>
+            <a:off x="9550400" y="1663700"/>
             <a:ext cx="50800" cy="0"/>
           </a:xfrm>
           <a:prstGeom prst="line">
@@ -4023,48 +4006,6 @@
       </p:cxnSp>
       <p:cxnSp>
         <p:nvCxnSpPr>
-          <p:cNvPr id="401" name="Линия 401"/>
-          <p:cNvCxnSpPr/>
-          <p:nvPr/>
-        </p:nvCxnSpPr>
-        <p:spPr>
-          <a:xfrm>
-            <a:off x="11607800" y="1854200"/>
-            <a:ext cx="25400" cy="0"/>
-          </a:xfrm>
-          <a:prstGeom prst="line">
-            <a:avLst/>
-          </a:prstGeom>
-          <a:ln w="12700">
-            <a:solidFill>
-              <a:srgbClr val="1F3864"/>
-            </a:solidFill>
-          </a:ln>
-        </p:spPr>
-      </p:cxnSp>
-      <p:cxnSp>
-        <p:nvCxnSpPr>
-          <p:cNvPr id="400" name="Линия 400"/>
-          <p:cNvCxnSpPr/>
-          <p:nvPr/>
-        </p:nvCxnSpPr>
-        <p:spPr>
-          <a:xfrm>
-            <a:off x="11633200" y="1651000"/>
-            <a:ext cx="0" cy="203200"/>
-          </a:xfrm>
-          <a:prstGeom prst="line">
-            <a:avLst/>
-          </a:prstGeom>
-          <a:ln w="12700">
-            <a:solidFill>
-              <a:srgbClr val="1F3864"/>
-            </a:solidFill>
-          </a:ln>
-        </p:spPr>
-      </p:cxnSp>
-      <p:cxnSp>
-        <p:nvCxnSpPr>
           <p:cNvPr id="399" name="Линия 399"/>
           <p:cNvCxnSpPr/>
           <p:nvPr/>
@@ -4113,7 +4054,7 @@
         </p:nvCxnSpPr>
         <p:spPr>
           <a:xfrm>
-            <a:off x="11734800" y="1460500"/>
+            <a:off x="11734800" y="1663700"/>
             <a:ext cx="127000" cy="0"/>
           </a:xfrm>
           <a:prstGeom prst="line">
@@ -4175,7 +4116,7 @@
           <p:nvPr/>
         </p:nvPicPr>
         <p:blipFill>
-          <a:blip r:embed="rId1">
+          <a:blip r:embed="rId2">
             <a:extLst>
               <a:ext uri="{28A0092B-C50C-407E-A947-70E740481C1C}">
                 <a14:useLocalDpi xmlns:a14="http://schemas.microsoft.com/office/drawing/2010/main" val="0"/>
@@ -4290,12 +4231,6 @@
               </a:rPr>
               <a:t>Верховный Попечитель</a:t>
             </a:r>
-            <a:endParaRPr lang="ru-RU" sz="1000" b="1" dirty="0">
-              <a:solidFill>
-                <a:srgbClr val="FFFFFF"/>
-              </a:solidFill>
-              <a:latin typeface="Segoe UI" panose="020B0502040204020203" pitchFamily="34" charset="0"/>
-            </a:endParaRPr>
           </a:p>
         </p:txBody>
       </p:sp>
@@ -4342,12 +4277,6 @@
               </a:rPr>
               <a:t>Главный исполнительный директор (ГИД)</a:t>
             </a:r>
-            <a:endParaRPr lang="ru-RU" sz="1000" b="1" dirty="0">
-              <a:solidFill>
-                <a:srgbClr val="FFFFFF"/>
-              </a:solidFill>
-              <a:latin typeface="Segoe UI" panose="020B0502040204020203" pitchFamily="34" charset="0"/>
-            </a:endParaRPr>
           </a:p>
           <a:p>
             <a:pPr algn="ctr">
@@ -4364,12 +4293,6 @@
               </a:rPr>
               <a:t>Қаражан Е.Н.</a:t>
             </a:r>
-            <a:endParaRPr lang="ru-RU" sz="1000" b="1" dirty="0">
-              <a:solidFill>
-                <a:srgbClr val="FFFFFF"/>
-              </a:solidFill>
-              <a:latin typeface="Segoe UI" panose="020B0502040204020203" pitchFamily="34" charset="0"/>
-            </a:endParaRPr>
           </a:p>
         </p:txBody>
       </p:sp>
@@ -4381,7 +4304,7 @@
         </p:nvSpPr>
         <p:spPr>
           <a:xfrm>
-            <a:off x="9601200" y="1270000"/>
+            <a:off x="9601200" y="1473200"/>
             <a:ext cx="2133600" cy="381000"/>
           </a:xfrm>
           <a:prstGeom prst="roundRect">
@@ -4408,13 +4331,13 @@
               </a:lnSpc>
             </a:pPr>
             <a:r>
-              <a:rPr lang="ru-RU" sz="900" dirty="0">
+              <a:rPr lang="ru-RU" sz="900" smtClean="0">
                 <a:solidFill>
                   <a:srgbClr val="1F3864"/>
                 </a:solidFill>
                 <a:latin typeface="Segoe UI" panose="020B0502040204020203" pitchFamily="34" charset="0"/>
               </a:rPr>
-              <a:t>Зам. ГИД (стратегия, проекты)</a:t>
+              <a:t>Зам. ГИД по стратегии и проектам</a:t>
             </a:r>
             <a:endParaRPr lang="ru-RU" sz="900" dirty="0">
               <a:solidFill>
@@ -4438,12 +4361,6 @@
               </a:rPr>
               <a:t>Кононец А.В.</a:t>
             </a:r>
-            <a:endParaRPr lang="ru-RU" sz="1000" b="1" dirty="0">
-              <a:solidFill>
-                <a:srgbClr val="1F3864"/>
-              </a:solidFill>
-              <a:latin typeface="Segoe UI" panose="020B0502040204020203" pitchFamily="34" charset="0"/>
-            </a:endParaRPr>
           </a:p>
         </p:txBody>
       </p:sp>
@@ -4490,12 +4407,6 @@
               </a:rPr>
               <a:t>Зам. ГИД (адм.-хоз. вопросы,</a:t>
             </a:r>
-            <a:endParaRPr lang="ru-RU" sz="900" dirty="0">
-              <a:solidFill>
-                <a:srgbClr val="1F3864"/>
-              </a:solidFill>
-              <a:latin typeface="Segoe UI" panose="020B0502040204020203" pitchFamily="34" charset="0"/>
-            </a:endParaRPr>
           </a:p>
           <a:p>
             <a:pPr algn="ctr">
@@ -4512,12 +4423,6 @@
               </a:rPr>
               <a:t>закупки, кадры, проекты)</a:t>
             </a:r>
-            <a:endParaRPr lang="ru-RU" sz="900" dirty="0">
-              <a:solidFill>
-                <a:srgbClr val="1F3864"/>
-              </a:solidFill>
-              <a:latin typeface="Segoe UI" panose="020B0502040204020203" pitchFamily="34" charset="0"/>
-            </a:endParaRPr>
           </a:p>
           <a:p>
             <a:pPr algn="ctr">
@@ -4537,12 +4442,6 @@
               </a:rPr>
               <a:t>Темирбеков М.Е.</a:t>
             </a:r>
-            <a:endParaRPr lang="ru-RU" sz="1000" b="1" dirty="0">
-              <a:solidFill>
-                <a:srgbClr val="1F3864"/>
-              </a:solidFill>
-              <a:latin typeface="Segoe UI" panose="020B0502040204020203" pitchFamily="34" charset="0"/>
-            </a:endParaRPr>
           </a:p>
         </p:txBody>
       </p:sp>
@@ -4589,12 +4488,6 @@
               </a:rPr>
               <a:t>Финансовый директор</a:t>
             </a:r>
-            <a:endParaRPr lang="ru-RU" sz="900" dirty="0">
-              <a:solidFill>
-                <a:srgbClr val="1F3864"/>
-              </a:solidFill>
-              <a:latin typeface="Segoe UI" panose="020B0502040204020203" pitchFamily="34" charset="0"/>
-            </a:endParaRPr>
           </a:p>
           <a:p>
             <a:pPr algn="ctr">
@@ -4614,12 +4507,6 @@
               </a:rPr>
               <a:t>Оразбаева М.К.</a:t>
             </a:r>
-            <a:endParaRPr lang="ru-RU" sz="1000" b="1" dirty="0">
-              <a:solidFill>
-                <a:srgbClr val="1F3864"/>
-              </a:solidFill>
-              <a:latin typeface="Segoe UI" panose="020B0502040204020203" pitchFamily="34" charset="0"/>
-            </a:endParaRPr>
           </a:p>
         </p:txBody>
       </p:sp>
@@ -4667,12 +4554,6 @@
               </a:rPr>
               <a:t>Бухгалтер</a:t>
             </a:r>
-            <a:endParaRPr lang="ru-RU" sz="900" dirty="0">
-              <a:solidFill>
-                <a:srgbClr val="787878"/>
-              </a:solidFill>
-              <a:latin typeface="Segoe UI" panose="020B0502040204020203" pitchFamily="34" charset="0"/>
-            </a:endParaRPr>
           </a:p>
           <a:p>
             <a:pPr algn="ctr">
@@ -4689,12 +4570,6 @@
               </a:rPr>
               <a:t>вакансия</a:t>
             </a:r>
-            <a:endParaRPr lang="ru-RU" sz="1000" i="1" dirty="0">
-              <a:solidFill>
-                <a:srgbClr val="787878"/>
-              </a:solidFill>
-              <a:latin typeface="Segoe UI" panose="020B0502040204020203" pitchFamily="34" charset="0"/>
-            </a:endParaRPr>
           </a:p>
         </p:txBody>
       </p:sp>
@@ -4741,12 +4616,6 @@
               </a:rPr>
               <a:t>Национальный координатор</a:t>
             </a:r>
-            <a:endParaRPr lang="ru-RU" sz="1000" b="1" dirty="0">
-              <a:solidFill>
-                <a:srgbClr val="FFFFFF"/>
-              </a:solidFill>
-              <a:latin typeface="Segoe UI" panose="020B0502040204020203" pitchFamily="34" charset="0"/>
-            </a:endParaRPr>
           </a:p>
         </p:txBody>
       </p:sp>
@@ -4845,12 +4714,6 @@
               </a:rPr>
               <a:t>Цифровое развитие (1)</a:t>
             </a:r>
-            <a:endParaRPr lang="ru-RU" sz="1000" b="1" dirty="0">
-              <a:solidFill>
-                <a:srgbClr val="FFFFFF"/>
-              </a:solidFill>
-              <a:latin typeface="Segoe UI" panose="020B0502040204020203" pitchFamily="34" charset="0"/>
-            </a:endParaRPr>
           </a:p>
         </p:txBody>
       </p:sp>
@@ -5297,12 +5160,6 @@
               </a:rPr>
               <a:t>Гл. специалист, социолог</a:t>
             </a:r>
-            <a:endParaRPr lang="ru-RU" sz="1000" dirty="0">
-              <a:solidFill>
-                <a:srgbClr val="464646"/>
-              </a:solidFill>
-              <a:latin typeface="Segoe UI" panose="020B0502040204020203" pitchFamily="34" charset="0"/>
-            </a:endParaRPr>
           </a:p>
           <a:p>
             <a:pPr algn="ctr">
@@ -5593,12 +5450,6 @@
               </a:rPr>
               <a:t>Главный специалист</a:t>
             </a:r>
-            <a:endParaRPr lang="ru-RU" sz="1000" dirty="0">
-              <a:solidFill>
-                <a:srgbClr val="464646"/>
-              </a:solidFill>
-              <a:latin typeface="Segoe UI" panose="020B0502040204020203" pitchFamily="34" charset="0"/>
-            </a:endParaRPr>
           </a:p>
           <a:p>
             <a:pPr algn="ctr">
@@ -5741,12 +5592,6 @@
               </a:rPr>
               <a:t>Главный специалист</a:t>
             </a:r>
-            <a:endParaRPr lang="ru-RU" sz="1000" dirty="0">
-              <a:solidFill>
-                <a:srgbClr val="464646"/>
-              </a:solidFill>
-              <a:latin typeface="Segoe UI" panose="020B0502040204020203" pitchFamily="34" charset="0"/>
-            </a:endParaRPr>
           </a:p>
           <a:p>
             <a:pPr algn="ctr">
@@ -5815,12 +5660,6 @@
               </a:rPr>
               <a:t>Ведущий специалист</a:t>
             </a:r>
-            <a:endParaRPr lang="ru-RU" sz="1000" dirty="0">
-              <a:solidFill>
-                <a:srgbClr val="464646"/>
-              </a:solidFill>
-              <a:latin typeface="Segoe UI" panose="020B0502040204020203" pitchFamily="34" charset="0"/>
-            </a:endParaRPr>
           </a:p>
           <a:p>
             <a:pPr algn="ctr">
@@ -5889,12 +5728,6 @@
               </a:rPr>
               <a:t>Ведущий специалист</a:t>
             </a:r>
-            <a:endParaRPr lang="ru-RU" sz="1000" dirty="0">
-              <a:solidFill>
-                <a:srgbClr val="464646"/>
-              </a:solidFill>
-              <a:latin typeface="Segoe UI" panose="020B0502040204020203" pitchFamily="34" charset="0"/>
-            </a:endParaRPr>
           </a:p>
           <a:p>
             <a:pPr algn="ctr">
@@ -6111,12 +5944,6 @@
               </a:rPr>
               <a:t>Гл. специалист, PR — пресс-секретарь</a:t>
             </a:r>
-            <a:endParaRPr lang="ru-RU" sz="1000" dirty="0">
-              <a:solidFill>
-                <a:srgbClr val="464646"/>
-              </a:solidFill>
-              <a:latin typeface="Segoe UI" panose="020B0502040204020203" pitchFamily="34" charset="0"/>
-            </a:endParaRPr>
           </a:p>
           <a:p>
             <a:pPr algn="ctr">
@@ -6185,12 +6012,6 @@
               </a:rPr>
               <a:t>Вед. специалист, фотограф-рилсмейкер</a:t>
             </a:r>
-            <a:endParaRPr lang="ru-RU" sz="1000" dirty="0">
-              <a:solidFill>
-                <a:srgbClr val="464646"/>
-              </a:solidFill>
-              <a:latin typeface="Segoe UI" panose="020B0502040204020203" pitchFamily="34" charset="0"/>
-            </a:endParaRPr>
           </a:p>
           <a:p>
             <a:pPr algn="ctr">
@@ -6259,12 +6080,6 @@
               </a:rPr>
               <a:t>Вед. специалист, менеджер по блогерам</a:t>
             </a:r>
-            <a:endParaRPr lang="ru-RU" sz="1000" dirty="0">
-              <a:solidFill>
-                <a:srgbClr val="464646"/>
-              </a:solidFill>
-              <a:latin typeface="Segoe UI" panose="020B0502040204020203" pitchFamily="34" charset="0"/>
-            </a:endParaRPr>
           </a:p>
           <a:p>
             <a:pPr algn="ctr">
@@ -6590,12 +6405,6 @@
               </a:rPr>
               <a:t>30</a:t>
             </a:r>
-            <a:endParaRPr lang="ru-RU" sz="1000" b="1" dirty="0">
-              <a:solidFill>
-                <a:srgbClr val="FF0000"/>
-              </a:solidFill>
-              <a:latin typeface="Segoe UI" panose="020B0502040204020203" pitchFamily="34" charset="0"/>
-            </a:endParaRPr>
           </a:p>
           <a:p>
             <a:pPr algn="ctr">
@@ -6612,12 +6421,6 @@
               </a:rPr>
               <a:t>ЦАКФ и проектный офис</a:t>
             </a:r>
-            <a:endParaRPr lang="ru-RU" sz="1000" b="1" dirty="0">
-              <a:solidFill>
-                <a:srgbClr val="1F3864"/>
-              </a:solidFill>
-              <a:latin typeface="Segoe UI" panose="020B0502040204020203" pitchFamily="34" charset="0"/>
-            </a:endParaRPr>
           </a:p>
           <a:p>
             <a:pPr algn="ctr">
@@ -6656,12 +6459,6 @@
               </a:rPr>
               <a:t>аутсорс — 7 позиций</a:t>
             </a:r>
-            <a:endParaRPr lang="ru-RU" sz="900" b="1" dirty="0">
-              <a:solidFill>
-                <a:srgbClr val="7F6000"/>
-              </a:solidFill>
-              <a:latin typeface="Segoe UI" panose="020B0502040204020203" pitchFamily="34" charset="0"/>
-            </a:endParaRPr>
           </a:p>
         </p:txBody>
       </p:sp>
@@ -6708,12 +6505,6 @@
               </a:rPr>
               <a:t>Вед. специалист (молодёжь, НПО)</a:t>
             </a:r>
-            <a:endParaRPr lang="ru-RU" sz="1000" dirty="0">
-              <a:solidFill>
-                <a:srgbClr val="464646"/>
-              </a:solidFill>
-              <a:latin typeface="Segoe UI" panose="020B0502040204020203" pitchFamily="34" charset="0"/>
-            </a:endParaRPr>
           </a:p>
           <a:p>
             <a:pPr algn="ctr">
@@ -6747,7 +6538,7 @@
         </p:nvSpPr>
         <p:spPr>
           <a:xfrm>
-            <a:off x="7620000" y="3251200"/>
+            <a:off x="7620000" y="3683000"/>
             <a:ext cx="1701800" cy="508000"/>
           </a:xfrm>
           <a:prstGeom prst="roundRect">
@@ -6822,7 +6613,7 @@
         </p:nvSpPr>
         <p:spPr>
           <a:xfrm>
-            <a:off x="7620000" y="2692400"/>
+            <a:off x="7620000" y="3124200"/>
             <a:ext cx="1701800" cy="508000"/>
           </a:xfrm>
           <a:prstGeom prst="roundRect">
@@ -6857,12 +6648,6 @@
               </a:rPr>
               <a:t>Эксперт-эколог</a:t>
             </a:r>
-            <a:endParaRPr lang="ru-RU" sz="1000" dirty="0">
-              <a:solidFill>
-                <a:srgbClr val="464646"/>
-              </a:solidFill>
-              <a:latin typeface="Segoe UI" panose="020B0502040204020203" pitchFamily="34" charset="0"/>
-            </a:endParaRPr>
           </a:p>
           <a:p>
             <a:pPr algn="ctr">
@@ -7072,12 +6857,6 @@
               </a:rPr>
               <a:t>приход в 2027 году</a:t>
             </a:r>
-            <a:endParaRPr lang="ru-RU" sz="900" dirty="0">
-              <a:solidFill>
-                <a:srgbClr val="464646"/>
-              </a:solidFill>
-              <a:latin typeface="Segoe UI" panose="020B0502040204020203" pitchFamily="34" charset="0"/>
-            </a:endParaRPr>
           </a:p>
         </p:txBody>
       </p:sp>
@@ -7156,12 +6935,6 @@
               </a:rPr>
               <a:t>всего в 2027 году 30 чел.</a:t>
             </a:r>
-            <a:endParaRPr lang="ru-RU" sz="1000" b="1" dirty="0">
-              <a:solidFill>
-                <a:srgbClr val="C00000"/>
-              </a:solidFill>
-              <a:latin typeface="Segoe UI" panose="020B0502040204020203" pitchFamily="34" charset="0"/>
-            </a:endParaRPr>
           </a:p>
         </p:txBody>
       </p:sp>
@@ -7173,8 +6946,8 @@
         </p:nvSpPr>
         <p:spPr>
           <a:xfrm>
-            <a:off x="9601200" y="1701800"/>
-            <a:ext cx="2006600" cy="304800"/>
+            <a:off x="7620000" y="2692400"/>
+            <a:ext cx="1701800" cy="381000"/>
           </a:xfrm>
           <a:prstGeom prst="roundRect">
             <a:avLst>
@@ -7191,7 +6964,7 @@
           </a:ln>
         </p:spPr>
         <p:txBody>
-          <a:bodyPr lIns="50800" tIns="12700" rIns="50800" bIns="12700" rtlCol="0" anchor="ctr"/>
+          <a:bodyPr lIns="25400" tIns="6350" rIns="25400" bIns="6350" rtlCol="0" anchor="ctr"/>
           <a:lstStyle/>
           <a:p>
             <a:pPr algn="ctr">
@@ -7200,7 +6973,7 @@
               </a:lnSpc>
             </a:pPr>
             <a:r>
-              <a:rPr lang="ru-RU" sz="900" dirty="0">
+              <a:rPr lang="ru-RU" sz="900" smtClean="0">
                 <a:solidFill>
                   <a:srgbClr val="1F3864"/>
                 </a:solidFill>
@@ -7316,15 +7089,15 @@
               </a:lnSpc>
             </a:pPr>
             <a:r>
-              <a:rPr lang="ru-RU" sz="1000" b="1" dirty="0">
+              <a:rPr lang="ru-RU" sz="750" b="1" smtClean="0">
                 <a:solidFill>
                   <a:srgbClr val="FFFFFF"/>
                 </a:solidFill>
                 <a:latin typeface="Segoe UI" panose="020B0502040204020203" pitchFamily="34" charset="0"/>
               </a:rPr>
-              <a:t>Экспертная группа (1+2)</a:t>
-            </a:r>
-            <a:endParaRPr lang="ru-RU" sz="1100" b="1" dirty="0">
+              <a:t>Проектный офис для Центральной Азии по изменению климата и зеленой энергетике (1+3)</a:t>
+            </a:r>
+            <a:endParaRPr lang="ru-RU" sz="750" b="1" dirty="0">
               <a:solidFill>
                 <a:srgbClr val="FFFFFF"/>
               </a:solidFill>
@@ -7437,15 +7210,30 @@
               </a:rPr>
               <a:t>Заместитель директора (МЭПР, ЦГО, регионы)</a:t>
             </a:r>
-            <a:endParaRPr lang="ru-RU" sz="1000" dirty="0">
-              <a:solidFill>
-                <a:srgbClr val="464646"/>
-              </a:solidFill>
-              <a:latin typeface="Segoe UI" panose="020B0502040204020203" pitchFamily="34" charset="0"/>
-            </a:endParaRPr>
-          </a:p>
-        </p:txBody>
-      </p:sp>
+          </a:p>
+        </p:txBody>
+      </p:sp>
+      <p:cxnSp>
+        <p:nvCxnSpPr>
+          <p:cNvPr id="111" name="Линия 425"/>
+          <p:cNvCxnSpPr/>
+          <p:nvPr/>
+        </p:nvCxnSpPr>
+        <p:spPr>
+          <a:xfrm>
+            <a:off x="9321800" y="3937000"/>
+            <a:ext cx="76200" cy="0"/>
+          </a:xfrm>
+          <a:prstGeom prst="line">
+            <a:avLst/>
+          </a:prstGeom>
+          <a:ln w="12700">
+            <a:solidFill>
+              <a:srgbClr val="1F3864"/>
+            </a:solidFill>
+          </a:ln>
+        </p:spPr>
+      </p:cxnSp>
     </p:spTree>
   </p:cSld>
   <p:clrMapOvr>
@@ -7705,6 +7493,8 @@
       </a:bgFillStyleLst>
     </a:fmtScheme>
   </a:themeElements>
+  <a:objectDefaults/>
+  <a:extraClrSchemeLst/>
   <a:extLst>
     <a:ext uri="{05A4C25C-085E-4340-85A3-A5531E510DB2}">
       <thm15:themeFamily xmlns:thm15="http://schemas.microsoft.com/office/thememl/2012/main" name="Office Theme" id="{62F939B6-93AF-4DB8-9C6B-D6C7DFDC589F}" vid="{4A3C46E8-61CC-4603-A589-7422A47A8E4A}"/>

--- a/TAZA/_документы/Структура ЦАКФ и проектного офиса ТК — без окладов.pptx
+++ b/TAZA/_документы/Структура ЦАКФ и проектного офиса ТК — без окладов.pptx
@@ -4767,7 +4767,7 @@
                 </a:solidFill>
                 <a:latin typeface="Segoe UI" panose="020B0502040204020203" pitchFamily="34" charset="0"/>
               </a:rPr>
-              <a:t>Тастан</a:t>
+              <a:t>Тастан Нұрбол</a:t>
             </a:r>
             <a:endParaRPr lang="ru-RU" sz="1100" b="1" dirty="0">
               <a:solidFill>
